--- a/스크립트언어/숙제제출/2021182014 박신우 숙제1.pptx
+++ b/스크립트언어/숙제제출/2021182014 박신우 숙제1.pptx
@@ -284,7 +284,7 @@
               <a:pPr>
                 <a:defRPr/>
               </a:pPr>
-              <a:t>2026-03-12</a:t>
+              <a:t>2026-03-16</a:t>
             </a:fld>
             <a:endParaRPr lang="ko-KR" altLang="en-US"/>
           </a:p>
@@ -9202,8 +9202,8 @@
         </p:blipFill>
         <p:spPr bwMode="auto">
           <a:xfrm>
-            <a:off x="755576" y="980728"/>
-            <a:ext cx="2592288" cy="5109338"/>
+            <a:off x="683568" y="836712"/>
+            <a:ext cx="2274216" cy="4482426"/>
           </a:xfrm>
           <a:prstGeom prst="rect">
             <a:avLst/>
@@ -9359,6 +9359,36 @@
           <a:xfrm>
             <a:off x="5292080" y="972109"/>
             <a:ext cx="1930387" cy="5350434"/>
+          </a:xfrm>
+          <a:prstGeom prst="rect">
+            <a:avLst/>
+          </a:prstGeom>
+        </p:spPr>
+      </p:pic>
+      <p:pic>
+        <p:nvPicPr>
+          <p:cNvPr id="6" name="그림 5">
+            <a:extLst>
+              <a:ext uri="{FF2B5EF4-FFF2-40B4-BE49-F238E27FC236}">
+                <a16:creationId xmlns:a16="http://schemas.microsoft.com/office/drawing/2014/main" id="{0F38D47C-7884-8CE7-4AEF-1BB3B5B795D1}"/>
+              </a:ext>
+            </a:extLst>
+          </p:cNvPr>
+          <p:cNvPicPr>
+            <a:picLocks noChangeAspect="1"/>
+          </p:cNvPicPr>
+          <p:nvPr/>
+        </p:nvPicPr>
+        <p:blipFill>
+          <a:blip r:embed="rId4"/>
+          <a:stretch>
+            <a:fillRect/>
+          </a:stretch>
+        </p:blipFill>
+        <p:spPr>
+          <a:xfrm>
+            <a:off x="568696" y="5180581"/>
+            <a:ext cx="4593332" cy="1523518"/>
           </a:xfrm>
           <a:prstGeom prst="rect">
             <a:avLst/>
